--- a/dist/초5/사회·역사/역사와생활/초5_사회·역사_역사와생활_05_개항과일제강점기.pptx
+++ b/dist/초5/사회·역사/역사와생활/초5_사회·역사_역사와생활_05_개항과일제강점기.pptx
@@ -121,13 +121,13 @@
   <p:extLst>
     <p:ext uri="{521415D9-36F7-43E2-AB2F-B90AF26B5E84}">
       <p14:sectionLst xmlns:p14="http://schemas.microsoft.com/office/powerpoint/2010/main">
-        <p14:section name="도입" id="{bd8c0d15-c675-6a64-7d13-271a2a23a528}">
+        <p14:section name="도입" id="{45feb961-b837-48e6-58a3-ebbb6d787ce8}">
           <p14:sldIdLst>
             <p14:sldId id="256"/>
             <p14:sldId id="257"/>
           </p14:sldIdLst>
         </p14:section>
-        <p14:section name="개념" id="{c1d74afc-6ac4-12b0-c411-0ced0ffe7975}">
+        <p14:section name="개념" id="{af40a9c9-c7ae-9650-4e4d-a5b22b66eee0}">
           <p14:sldIdLst>
             <p14:sldId id="258"/>
             <p14:sldId id="259"/>
@@ -137,31 +137,31 @@
             <p14:sldId id="264"/>
           </p14:sldIdLst>
         </p14:section>
-        <p14:section name="연습" id="{ad353551-0cea-abba-8e60-bb4e1ac6a2fe}">
+        <p14:section name="연습" id="{f52949fc-9874-95bc-6062-9da29ba970b8}">
           <p14:sldIdLst>
             <p14:sldId id="261"/>
             <p14:sldId id="265"/>
             <p14:sldId id="266"/>
           </p14:sldIdLst>
         </p14:section>
-        <p14:section name="개념" id="{96523d74-15f3-408a-f5be-88f6a404dc1a}">
+        <p14:section name="개념" id="{818457d2-cd52-12d8-e399-05a21c4617d4}">
           <p14:sldIdLst/>
         </p14:section>
-        <p14:section name="연습" id="{bea9c1cd-6a22-4a11-db86-af29646da24f}">
+        <p14:section name="연습" id="{bb0cc7f4-9f5c-100f-5a53-27390a474d1a}">
           <p14:sldIdLst/>
         </p14:section>
-        <p14:section name="확인" id="{4e9a8b3d-202b-ed86-9982-49c948a533aa}">
+        <p14:section name="확인" id="{6ded2574-39af-b4c4-ead1-611b3ed89eba}">
           <p14:sldIdLst>
             <p14:sldId id="267"/>
             <p14:sldId id="268"/>
           </p14:sldIdLst>
         </p14:section>
-        <p14:section name="정리" id="{23182fc8-d6a0-e4d3-d08a-4aa6137c4f7e}">
+        <p14:section name="정리" id="{9d55aa65-d5ba-8fa5-0078-4bfd2303613f}">
           <p14:sldIdLst>
             <p14:sldId id="269"/>
           </p14:sldIdLst>
         </p14:section>
-        <p14:section name="보충" id="{e13f93e3-d5b4-872b-9a3b-a6f7bf88b303}">
+        <p14:section name="보충" id="{5b71a0b5-c6bc-2ddc-56e5-e14f545ab1be}">
           <p14:sldIdLst>
             <p14:sldId id="270"/>
           </p14:sldIdLst>
